--- a/Day28-Agent-Protocols-MCP-and-A2A/Day28_Deck_Agent_Protocols_MCP_and_A2A.pptx
+++ b/Day28-Agent-Protocols-MCP-and-A2A/Day28_Deck_Agent_Protocols_MCP_and_A2A.pptx
@@ -5960,13 +5960,13 @@
           <a:noFill/>
         </p:spPr>
         <p:txBody>
-          <a:bodyPr wrap="square" lIns="0" rIns="0" tIns="0" bIns="0" anchor="t">
-            <a:spAutoFit/>
-          </a:bodyPr>
-          <a:lstStyle/>
-          <a:p>
-            <a:r>
-              <a:rPr sz="1000" b="0" i="0">
+          <a:bodyPr wrap="none" lIns="0" rIns="0" tIns="0" bIns="0" anchor="t">
+            <a:spAutoFit/>
+          </a:bodyPr>
+          <a:lstStyle/>
+          <a:p>
+            <a:r>
+              <a:rPr sz="880" b="0" i="0">
                 <a:solidFill>
                   <a:srgbClr val="EAF7F5"/>
                 </a:solidFill>
@@ -5977,7 +5977,7 @@
           </a:p>
           <a:p>
             <a:r>
-              <a:rPr sz="1000" b="0" i="0">
+              <a:rPr sz="880" b="0" i="0">
                 <a:solidFill>
                   <a:srgbClr val="EAF7F5"/>
                 </a:solidFill>
@@ -5988,7 +5988,7 @@
           </a:p>
           <a:p>
             <a:r>
-              <a:rPr sz="1000" b="0" i="0">
+              <a:rPr sz="880" b="0" i="0">
                 <a:solidFill>
                   <a:srgbClr val="EAF7F5"/>
                 </a:solidFill>
@@ -5999,7 +5999,7 @@
           </a:p>
           <a:p>
             <a:r>
-              <a:rPr sz="1000" b="0" i="0">
+              <a:rPr sz="880" b="0" i="0">
                 <a:solidFill>
                   <a:srgbClr val="EAF7F5"/>
                 </a:solidFill>
@@ -6010,7 +6010,7 @@
           </a:p>
           <a:p>
             <a:r>
-              <a:rPr sz="1000" b="0" i="0">
+              <a:rPr sz="880" b="0" i="0">
                 <a:solidFill>
                   <a:srgbClr val="EAF7F5"/>
                 </a:solidFill>
@@ -6021,7 +6021,7 @@
           </a:p>
           <a:p>
             <a:r>
-              <a:rPr sz="1000" b="0" i="0">
+              <a:rPr sz="880" b="0" i="0">
                 <a:solidFill>
                   <a:srgbClr val="EAF7F5"/>
                 </a:solidFill>
@@ -6032,7 +6032,7 @@
           </a:p>
           <a:p>
             <a:r>
-              <a:rPr sz="1000" b="0" i="0">
+              <a:rPr sz="880" b="0" i="0">
                 <a:solidFill>
                   <a:srgbClr val="EAF7F5"/>
                 </a:solidFill>
@@ -6043,7 +6043,7 @@
           </a:p>
           <a:p>
             <a:r>
-              <a:rPr sz="1000" b="0" i="0">
+              <a:rPr sz="880" b="0" i="0">
                 <a:solidFill>
                   <a:srgbClr val="EAF7F5"/>
                 </a:solidFill>
@@ -6054,7 +6054,7 @@
           </a:p>
           <a:p>
             <a:r>
-              <a:rPr sz="1000" b="0" i="0">
+              <a:rPr sz="880" b="0" i="0">
                 <a:solidFill>
                   <a:srgbClr val="EAF7F5"/>
                 </a:solidFill>
@@ -6065,7 +6065,7 @@
           </a:p>
           <a:p>
             <a:r>
-              <a:rPr sz="1000" b="0" i="0">
+              <a:rPr sz="880" b="0" i="0">
                 <a:solidFill>
                   <a:srgbClr val="EAF7F5"/>
                 </a:solidFill>
@@ -6076,7 +6076,7 @@
           </a:p>
           <a:p>
             <a:r>
-              <a:rPr sz="1000" b="0" i="0">
+              <a:rPr sz="880" b="0" i="0">
                 <a:solidFill>
                   <a:srgbClr val="EAF7F5"/>
                 </a:solidFill>
@@ -6087,7 +6087,7 @@
           </a:p>
           <a:p>
             <a:r>
-              <a:rPr sz="1000" b="0" i="0">
+              <a:rPr sz="880" b="0" i="0">
                 <a:solidFill>
                   <a:srgbClr val="EAF7F5"/>
                 </a:solidFill>
@@ -6098,7 +6098,7 @@
           </a:p>
           <a:p>
             <a:r>
-              <a:rPr sz="1000" b="0" i="0">
+              <a:rPr sz="880" b="0" i="0">
                 <a:solidFill>
                   <a:srgbClr val="EAF7F5"/>
                 </a:solidFill>
@@ -6109,7 +6109,7 @@
           </a:p>
           <a:p>
             <a:r>
-              <a:rPr sz="1000" b="0" i="0">
+              <a:rPr sz="880" b="0" i="0">
                 <a:solidFill>
                   <a:srgbClr val="EAF7F5"/>
                 </a:solidFill>
@@ -6120,7 +6120,7 @@
           </a:p>
           <a:p>
             <a:r>
-              <a:rPr sz="1000" b="0" i="0">
+              <a:rPr sz="880" b="0" i="0">
                 <a:solidFill>
                   <a:srgbClr val="EAF7F5"/>
                 </a:solidFill>
@@ -6487,13 +6487,13 @@
           <a:noFill/>
         </p:spPr>
         <p:txBody>
-          <a:bodyPr wrap="square" lIns="0" rIns="0" tIns="0" bIns="0" anchor="t">
-            <a:spAutoFit/>
-          </a:bodyPr>
-          <a:lstStyle/>
-          <a:p>
-            <a:r>
-              <a:rPr sz="980" b="0" i="0">
+          <a:bodyPr wrap="none" lIns="0" rIns="0" tIns="0" bIns="0" anchor="t">
+            <a:spAutoFit/>
+          </a:bodyPr>
+          <a:lstStyle/>
+          <a:p>
+            <a:r>
+              <a:rPr sz="863" b="0" i="0">
                 <a:solidFill>
                   <a:srgbClr val="EAF7F5"/>
                 </a:solidFill>
@@ -6504,7 +6504,7 @@
           </a:p>
           <a:p>
             <a:r>
-              <a:rPr sz="980" b="0" i="0">
+              <a:rPr sz="863" b="0" i="0">
                 <a:solidFill>
                   <a:srgbClr val="EAF7F5"/>
                 </a:solidFill>
@@ -6515,7 +6515,7 @@
           </a:p>
           <a:p>
             <a:r>
-              <a:rPr sz="980" b="0" i="0">
+              <a:rPr sz="863" b="0" i="0">
                 <a:solidFill>
                   <a:srgbClr val="EAF7F5"/>
                 </a:solidFill>
@@ -6526,7 +6526,7 @@
           </a:p>
           <a:p>
             <a:r>
-              <a:rPr sz="980" b="0" i="0">
+              <a:rPr sz="863" b="0" i="0">
                 <a:solidFill>
                   <a:srgbClr val="EAF7F5"/>
                 </a:solidFill>
@@ -6537,7 +6537,7 @@
           </a:p>
           <a:p>
             <a:r>
-              <a:rPr sz="980" b="0" i="0">
+              <a:rPr sz="863" b="0" i="0">
                 <a:solidFill>
                   <a:srgbClr val="EAF7F5"/>
                 </a:solidFill>
@@ -6548,7 +6548,7 @@
           </a:p>
           <a:p>
             <a:r>
-              <a:rPr sz="980" b="0" i="0">
+              <a:rPr sz="863" b="0" i="0">
                 <a:solidFill>
                   <a:srgbClr val="EAF7F5"/>
                 </a:solidFill>
@@ -6559,7 +6559,7 @@
           </a:p>
           <a:p>
             <a:r>
-              <a:rPr sz="980" b="0" i="0">
+              <a:rPr sz="863" b="0" i="0">
                 <a:solidFill>
                   <a:srgbClr val="EAF7F5"/>
                 </a:solidFill>
@@ -6570,7 +6570,7 @@
           </a:p>
           <a:p>
             <a:r>
-              <a:rPr sz="980" b="0" i="0">
+              <a:rPr sz="863" b="0" i="0">
                 <a:solidFill>
                   <a:srgbClr val="EAF7F5"/>
                 </a:solidFill>
@@ -6581,7 +6581,7 @@
           </a:p>
           <a:p>
             <a:r>
-              <a:rPr sz="980" b="0" i="0">
+              <a:rPr sz="863" b="0" i="0">
                 <a:solidFill>
                   <a:srgbClr val="EAF7F5"/>
                 </a:solidFill>
@@ -6592,7 +6592,7 @@
           </a:p>
           <a:p>
             <a:r>
-              <a:rPr sz="980" b="0" i="0">
+              <a:rPr sz="863" b="0" i="0">
                 <a:solidFill>
                   <a:srgbClr val="EAF7F5"/>
                 </a:solidFill>
@@ -6603,7 +6603,7 @@
           </a:p>
           <a:p>
             <a:r>
-              <a:rPr sz="980" b="0" i="0">
+              <a:rPr sz="863" b="0" i="0">
                 <a:solidFill>
                   <a:srgbClr val="EAF7F5"/>
                 </a:solidFill>
@@ -6970,13 +6970,13 @@
           <a:noFill/>
         </p:spPr>
         <p:txBody>
-          <a:bodyPr wrap="square" lIns="0" rIns="0" tIns="0" bIns="0" anchor="t">
-            <a:spAutoFit/>
-          </a:bodyPr>
-          <a:lstStyle/>
-          <a:p>
-            <a:r>
-              <a:rPr sz="894" b="0" i="0">
+          <a:bodyPr wrap="none" lIns="0" rIns="0" tIns="0" bIns="0" anchor="t">
+            <a:spAutoFit/>
+          </a:bodyPr>
+          <a:lstStyle/>
+          <a:p>
+            <a:r>
+              <a:rPr sz="787" b="0" i="0">
                 <a:solidFill>
                   <a:srgbClr val="EAF7F5"/>
                 </a:solidFill>
@@ -6987,7 +6987,7 @@
           </a:p>
           <a:p>
             <a:r>
-              <a:rPr sz="894" b="0" i="0">
+              <a:rPr sz="787" b="0" i="0">
                 <a:solidFill>
                   <a:srgbClr val="EAF7F5"/>
                 </a:solidFill>
@@ -6998,7 +6998,7 @@
           </a:p>
           <a:p>
             <a:r>
-              <a:rPr sz="894" b="0" i="0">
+              <a:rPr sz="787" b="0" i="0">
                 <a:solidFill>
                   <a:srgbClr val="EAF7F5"/>
                 </a:solidFill>
@@ -7009,7 +7009,7 @@
           </a:p>
           <a:p>
             <a:r>
-              <a:rPr sz="894" b="0" i="0">
+              <a:rPr sz="787" b="0" i="0">
                 <a:solidFill>
                   <a:srgbClr val="EAF7F5"/>
                 </a:solidFill>
@@ -7020,7 +7020,7 @@
           </a:p>
           <a:p>
             <a:r>
-              <a:rPr sz="894" b="0" i="0">
+              <a:rPr sz="787" b="0" i="0">
                 <a:solidFill>
                   <a:srgbClr val="EAF7F5"/>
                 </a:solidFill>
@@ -7031,7 +7031,7 @@
           </a:p>
           <a:p>
             <a:r>
-              <a:rPr sz="894" b="0" i="0">
+              <a:rPr sz="787" b="0" i="0">
                 <a:solidFill>
                   <a:srgbClr val="EAF7F5"/>
                 </a:solidFill>
@@ -7042,7 +7042,7 @@
           </a:p>
           <a:p>
             <a:r>
-              <a:rPr sz="894" b="0" i="0">
+              <a:rPr sz="787" b="0" i="0">
                 <a:solidFill>
                   <a:srgbClr val="EAF7F5"/>
                 </a:solidFill>
@@ -7053,7 +7053,7 @@
           </a:p>
           <a:p>
             <a:r>
-              <a:rPr sz="894" b="0" i="0">
+              <a:rPr sz="787" b="0" i="0">
                 <a:solidFill>
                   <a:srgbClr val="EAF7F5"/>
                 </a:solidFill>
@@ -7064,7 +7064,7 @@
           </a:p>
           <a:p>
             <a:r>
-              <a:rPr sz="894" b="0" i="0">
+              <a:rPr sz="787" b="0" i="0">
                 <a:solidFill>
                   <a:srgbClr val="EAF7F5"/>
                 </a:solidFill>
@@ -7075,7 +7075,7 @@
           </a:p>
           <a:p>
             <a:r>
-              <a:rPr sz="894" b="0" i="0">
+              <a:rPr sz="787" b="0" i="0">
                 <a:solidFill>
                   <a:srgbClr val="EAF7F5"/>
                 </a:solidFill>
@@ -22192,7 +22192,7 @@
           <a:noFill/>
         </p:spPr>
         <p:txBody>
-          <a:bodyPr wrap="square" lIns="0" rIns="0" tIns="0" bIns="0" anchor="t">
+          <a:bodyPr wrap="none" lIns="0" rIns="0" tIns="0" bIns="0" anchor="t">
             <a:spAutoFit/>
           </a:bodyPr>
           <a:lstStyle/>
